--- a/docs/materials/functions_and_arguments.pptx
+++ b/docs/materials/functions_and_arguments.pptx
@@ -5,7 +5,7 @@
     <p:sldMasterId id="2147483648" r:id="rId1"/>
   </p:sldMasterIdLst>
   <p:sldIdLst>
-    <p:sldId id="262" r:id="rId2"/>
+    <p:sldId id="263" r:id="rId2"/>
   </p:sldIdLst>
   <p:sldSz cx="12192000" cy="6858000"/>
   <p:notesSz cx="6858000" cy="9144000"/>
@@ -272,7 +272,7 @@
           <a:p>
             <a:fld id="{A32AF175-EFA6-4831-8A62-20D923136DD7}" type="datetimeFigureOut">
               <a:rPr lang="en-DE" smtClean="0"/>
-              <a:t>18/03/2026</a:t>
+              <a:t>17/09/2026</a:t>
             </a:fld>
             <a:endParaRPr lang="en-DE"/>
           </a:p>
@@ -472,7 +472,7 @@
           <a:p>
             <a:fld id="{A32AF175-EFA6-4831-8A62-20D923136DD7}" type="datetimeFigureOut">
               <a:rPr lang="en-DE" smtClean="0"/>
-              <a:t>18/03/2026</a:t>
+              <a:t>17/09/2026</a:t>
             </a:fld>
             <a:endParaRPr lang="en-DE"/>
           </a:p>
@@ -682,7 +682,7 @@
           <a:p>
             <a:fld id="{A32AF175-EFA6-4831-8A62-20D923136DD7}" type="datetimeFigureOut">
               <a:rPr lang="en-DE" smtClean="0"/>
-              <a:t>18/03/2026</a:t>
+              <a:t>17/09/2026</a:t>
             </a:fld>
             <a:endParaRPr lang="en-DE"/>
           </a:p>
@@ -882,7 +882,7 @@
           <a:p>
             <a:fld id="{A32AF175-EFA6-4831-8A62-20D923136DD7}" type="datetimeFigureOut">
               <a:rPr lang="en-DE" smtClean="0"/>
-              <a:t>18/03/2026</a:t>
+              <a:t>17/09/2026</a:t>
             </a:fld>
             <a:endParaRPr lang="en-DE"/>
           </a:p>
@@ -1158,7 +1158,7 @@
           <a:p>
             <a:fld id="{A32AF175-EFA6-4831-8A62-20D923136DD7}" type="datetimeFigureOut">
               <a:rPr lang="en-DE" smtClean="0"/>
-              <a:t>18/03/2026</a:t>
+              <a:t>17/09/2026</a:t>
             </a:fld>
             <a:endParaRPr lang="en-DE"/>
           </a:p>
@@ -1426,7 +1426,7 @@
           <a:p>
             <a:fld id="{A32AF175-EFA6-4831-8A62-20D923136DD7}" type="datetimeFigureOut">
               <a:rPr lang="en-DE" smtClean="0"/>
-              <a:t>18/03/2026</a:t>
+              <a:t>17/09/2026</a:t>
             </a:fld>
             <a:endParaRPr lang="en-DE"/>
           </a:p>
@@ -1841,7 +1841,7 @@
           <a:p>
             <a:fld id="{A32AF175-EFA6-4831-8A62-20D923136DD7}" type="datetimeFigureOut">
               <a:rPr lang="en-DE" smtClean="0"/>
-              <a:t>18/03/2026</a:t>
+              <a:t>17/09/2026</a:t>
             </a:fld>
             <a:endParaRPr lang="en-DE"/>
           </a:p>
@@ -1983,7 +1983,7 @@
           <a:p>
             <a:fld id="{A32AF175-EFA6-4831-8A62-20D923136DD7}" type="datetimeFigureOut">
               <a:rPr lang="en-DE" smtClean="0"/>
-              <a:t>18/03/2026</a:t>
+              <a:t>17/09/2026</a:t>
             </a:fld>
             <a:endParaRPr lang="en-DE"/>
           </a:p>
@@ -2096,7 +2096,7 @@
           <a:p>
             <a:fld id="{A32AF175-EFA6-4831-8A62-20D923136DD7}" type="datetimeFigureOut">
               <a:rPr lang="en-DE" smtClean="0"/>
-              <a:t>18/03/2026</a:t>
+              <a:t>17/09/2026</a:t>
             </a:fld>
             <a:endParaRPr lang="en-DE"/>
           </a:p>
@@ -2409,7 +2409,7 @@
           <a:p>
             <a:fld id="{A32AF175-EFA6-4831-8A62-20D923136DD7}" type="datetimeFigureOut">
               <a:rPr lang="en-DE" smtClean="0"/>
-              <a:t>18/03/2026</a:t>
+              <a:t>17/09/2026</a:t>
             </a:fld>
             <a:endParaRPr lang="en-DE"/>
           </a:p>
@@ -2698,7 +2698,7 @@
           <a:p>
             <a:fld id="{A32AF175-EFA6-4831-8A62-20D923136DD7}" type="datetimeFigureOut">
               <a:rPr lang="en-DE" smtClean="0"/>
-              <a:t>18/03/2026</a:t>
+              <a:t>17/09/2026</a:t>
             </a:fld>
             <a:endParaRPr lang="en-DE"/>
           </a:p>
@@ -2941,7 +2941,7 @@
           <a:p>
             <a:fld id="{A32AF175-EFA6-4831-8A62-20D923136DD7}" type="datetimeFigureOut">
               <a:rPr lang="en-DE" smtClean="0"/>
-              <a:t>18/03/2026</a:t>
+              <a:t>17/09/2026</a:t>
             </a:fld>
             <a:endParaRPr lang="en-DE"/>
           </a:p>
@@ -3346,13 +3346,7 @@
   <p:cSld>
     <p:spTree>
       <p:nvGrpSpPr>
-        <p:cNvPr id="1" name="">
-          <a:extLst>
-            <a:ext uri="{FF2B5EF4-FFF2-40B4-BE49-F238E27FC236}">
-              <a16:creationId xmlns:a16="http://schemas.microsoft.com/office/drawing/2014/main" id="{D20CBE02-F8CE-2C1A-333C-E6CD22C25422}"/>
-            </a:ext>
-          </a:extLst>
-        </p:cNvPr>
+        <p:cNvPr id="1" name=""/>
         <p:cNvGrpSpPr/>
         <p:nvPr/>
       </p:nvGrpSpPr>
@@ -3366,10 +3360,10 @@
       </p:grpSpPr>
       <p:graphicFrame>
         <p:nvGraphicFramePr>
-          <p:cNvPr id="8" name="Object 7">
-            <a:extLst>
-              <a:ext uri="{FF2B5EF4-FFF2-40B4-BE49-F238E27FC236}">
-                <a16:creationId xmlns:a16="http://schemas.microsoft.com/office/drawing/2014/main" id="{B0E9B2E2-34AD-D84F-A42F-A27B13FD9364}"/>
+          <p:cNvPr id="4" name="Object 3">
+            <a:extLst>
+              <a:ext uri="{FF2B5EF4-FFF2-40B4-BE49-F238E27FC236}">
+                <a16:creationId xmlns:a16="http://schemas.microsoft.com/office/drawing/2014/main" id="{1C18060B-E0DD-6232-3FA8-B24152103FDD}"/>
               </a:ext>
             </a:extLst>
           </p:cNvPr>
@@ -3379,35 +3373,29 @@
           <p:nvPr>
             <p:extLst>
               <p:ext uri="{D42A27DB-BD31-4B8C-83A1-F6EECF244321}">
-                <p14:modId xmlns:p14="http://schemas.microsoft.com/office/powerpoint/2010/main" val="2677074115"/>
+                <p14:modId xmlns:p14="http://schemas.microsoft.com/office/powerpoint/2010/main" val="27383455"/>
               </p:ext>
             </p:extLst>
           </p:nvPr>
         </p:nvGraphicFramePr>
         <p:xfrm>
-          <a:off x="511175" y="128589"/>
-          <a:ext cx="11045285" cy="6647342"/>
+          <a:off x="614362" y="84822"/>
+          <a:ext cx="10963275" cy="6688356"/>
         </p:xfrm>
         <a:graphic>
           <a:graphicData uri="http://schemas.openxmlformats.org/presentationml/2006/ole">
             <mc:AlternateContent xmlns:mc="http://schemas.openxmlformats.org/markup-compatibility/2006">
               <mc:Choice xmlns:v="urn:schemas-microsoft-com:vml" Requires="v">
-                <p:oleObj name="Worksheet" r:id="rId2" imgW="9401115" imgH="5657763" progId="Excel.Sheet.12">
+                <p:oleObj name="Worksheet" r:id="rId2" imgW="9648749" imgH="5886400" progId="Excel.Sheet.12">
                   <p:embed/>
                 </p:oleObj>
               </mc:Choice>
               <mc:Fallback>
-                <p:oleObj name="Worksheet" r:id="rId2" imgW="9401115" imgH="5657763" progId="Excel.Sheet.12">
+                <p:oleObj name="Worksheet" r:id="rId2" imgW="9648749" imgH="5886400" progId="Excel.Sheet.12">
                   <p:embed/>
                   <p:pic>
                     <p:nvPicPr>
-                      <p:cNvPr id="8" name="Object 7">
-                        <a:extLst>
-                          <a:ext uri="{FF2B5EF4-FFF2-40B4-BE49-F238E27FC236}">
-                            <a16:creationId xmlns:a16="http://schemas.microsoft.com/office/drawing/2014/main" id="{9CDDF04A-1DE2-A3BC-E095-E460F8CD83D5}"/>
-                          </a:ext>
-                        </a:extLst>
-                      </p:cNvPr>
+                      <p:cNvPr id="0" name=""/>
                       <p:cNvPicPr/>
                       <p:nvPr/>
                     </p:nvPicPr>
@@ -3419,12 +3407,17 @@
                     </p:blipFill>
                     <p:spPr>
                       <a:xfrm>
-                        <a:off x="511175" y="128589"/>
-                        <a:ext cx="11045285" cy="6647342"/>
+                        <a:off x="614362" y="84822"/>
+                        <a:ext cx="10963275" cy="6688356"/>
                       </a:xfrm>
                       <a:prstGeom prst="rect">
                         <a:avLst/>
                       </a:prstGeom>
+                      <a:ln w="19050">
+                        <a:solidFill>
+                          <a:srgbClr val="D9D9D9"/>
+                        </a:solidFill>
+                      </a:ln>
                     </p:spPr>
                   </p:pic>
                 </p:oleObj>
@@ -3433,192 +3426,10 @@
           </a:graphicData>
         </a:graphic>
       </p:graphicFrame>
-      <p:graphicFrame>
-        <p:nvGraphicFramePr>
-          <p:cNvPr id="3" name="Table 2">
-            <a:extLst>
-              <a:ext uri="{FF2B5EF4-FFF2-40B4-BE49-F238E27FC236}">
-                <a16:creationId xmlns:a16="http://schemas.microsoft.com/office/drawing/2014/main" id="{AD9DD545-DE6D-36F9-D873-20511B7E7A2E}"/>
-              </a:ext>
-            </a:extLst>
-          </p:cNvPr>
-          <p:cNvGraphicFramePr>
-            <a:graphicFrameLocks noGrp="1"/>
-          </p:cNvGraphicFramePr>
-          <p:nvPr/>
-        </p:nvGraphicFramePr>
-        <p:xfrm>
-          <a:off x="703094" y="1220586"/>
-          <a:ext cx="284162" cy="436245"/>
-        </p:xfrm>
-        <a:graphic>
-          <a:graphicData uri="http://schemas.openxmlformats.org/drawingml/2006/table">
-            <a:tbl>
-              <a:tblPr>
-                <a:tableStyleId>{5C22544A-7EE6-4342-B048-85BDC9FD1C3A}</a:tableStyleId>
-              </a:tblPr>
-              <a:tblGrid>
-                <a:gridCol w="284162">
-                  <a:extLst>
-                    <a:ext uri="{9D8B030D-6E8A-4147-A177-3AD203B41FA5}">
-                      <a16:colId xmlns:a16="http://schemas.microsoft.com/office/drawing/2014/main" val="2080744485"/>
-                    </a:ext>
-                  </a:extLst>
-                </a:gridCol>
-              </a:tblGrid>
-              <a:tr h="228600">
-                <a:tc>
-                  <a:txBody>
-                    <a:bodyPr/>
-                    <a:lstStyle/>
-                    <a:p>
-                      <a:pPr algn="ctr" fontAlgn="ctr">
-                        <a:buNone/>
-                      </a:pPr>
-                      <a:r>
-                        <a:rPr lang="en-DE" sz="2800" u="none" strike="noStrike" dirty="0">
-                          <a:solidFill>
-                            <a:srgbClr val="1E3283"/>
-                          </a:solidFill>
-                          <a:effectLst/>
-                        </a:rPr>
-                        <a:t>•</a:t>
-                      </a:r>
-                      <a:endParaRPr lang="en-DE" sz="2800" b="1" i="0" u="none" strike="noStrike" dirty="0">
-                        <a:solidFill>
-                          <a:srgbClr val="1E3283"/>
-                        </a:solidFill>
-                        <a:effectLst/>
-                        <a:latin typeface="Arial" panose="020B0604020202020204" pitchFamily="34" charset="0"/>
-                      </a:endParaRPr>
-                    </a:p>
-                  </a:txBody>
-                  <a:tcPr marL="9525" marR="9525" marT="9525" marB="0" anchor="ctr">
-                    <a:lnL w="12700" cmpd="sng">
-                      <a:noFill/>
-                    </a:lnL>
-                    <a:lnR w="12700" cmpd="sng">
-                      <a:noFill/>
-                    </a:lnR>
-                    <a:lnT w="12700" cmpd="sng">
-                      <a:noFill/>
-                    </a:lnT>
-                    <a:lnB w="12700" cmpd="sng">
-                      <a:noFill/>
-                    </a:lnB>
-                    <a:lnTlToBr w="12700" cmpd="sng">
-                      <a:noFill/>
-                      <a:prstDash val="solid"/>
-                    </a:lnTlToBr>
-                    <a:lnBlToTr w="12700" cmpd="sng">
-                      <a:noFill/>
-                      <a:prstDash val="solid"/>
-                    </a:lnBlToTr>
-                    <a:noFill/>
-                  </a:tcPr>
-                </a:tc>
-                <a:extLst>
-                  <a:ext uri="{0D108BD9-81ED-4DB2-BD59-A6C34878D82A}">
-                    <a16:rowId xmlns:a16="http://schemas.microsoft.com/office/drawing/2014/main" val="1658275772"/>
-                  </a:ext>
-                </a:extLst>
-              </a:tr>
-            </a:tbl>
-          </a:graphicData>
-        </a:graphic>
-      </p:graphicFrame>
-      <p:graphicFrame>
-        <p:nvGraphicFramePr>
-          <p:cNvPr id="4" name="Table 3">
-            <a:extLst>
-              <a:ext uri="{FF2B5EF4-FFF2-40B4-BE49-F238E27FC236}">
-                <a16:creationId xmlns:a16="http://schemas.microsoft.com/office/drawing/2014/main" id="{58063509-5A14-57BA-207D-0171BC2FA689}"/>
-              </a:ext>
-            </a:extLst>
-          </p:cNvPr>
-          <p:cNvGraphicFramePr>
-            <a:graphicFrameLocks noGrp="1"/>
-          </p:cNvGraphicFramePr>
-          <p:nvPr/>
-        </p:nvGraphicFramePr>
-        <p:xfrm>
-          <a:off x="703094" y="1458163"/>
-          <a:ext cx="284162" cy="344805"/>
-        </p:xfrm>
-        <a:graphic>
-          <a:graphicData uri="http://schemas.openxmlformats.org/drawingml/2006/table">
-            <a:tbl>
-              <a:tblPr>
-                <a:tableStyleId>{5C22544A-7EE6-4342-B048-85BDC9FD1C3A}</a:tableStyleId>
-              </a:tblPr>
-              <a:tblGrid>
-                <a:gridCol w="284162">
-                  <a:extLst>
-                    <a:ext uri="{9D8B030D-6E8A-4147-A177-3AD203B41FA5}">
-                      <a16:colId xmlns:a16="http://schemas.microsoft.com/office/drawing/2014/main" val="2080744485"/>
-                    </a:ext>
-                  </a:extLst>
-                </a:gridCol>
-              </a:tblGrid>
-              <a:tr h="228600">
-                <a:tc>
-                  <a:txBody>
-                    <a:bodyPr/>
-                    <a:lstStyle/>
-                    <a:p>
-                      <a:pPr algn="ctr" fontAlgn="ctr">
-                        <a:buNone/>
-                      </a:pPr>
-                      <a:r>
-                        <a:rPr lang="en-DE" sz="2200" b="1" i="0" u="none" strike="noStrike" dirty="0">
-                          <a:solidFill>
-                            <a:srgbClr val="1E3283"/>
-                          </a:solidFill>
-                          <a:effectLst/>
-                          <a:latin typeface="Arial" panose="020B0604020202020204" pitchFamily="34" charset="0"/>
-                        </a:rPr>
-                        <a:t>○</a:t>
-                      </a:r>
-                    </a:p>
-                  </a:txBody>
-                  <a:tcPr marL="9525" marR="9525" marT="9525" marB="0" anchor="ctr">
-                    <a:lnL w="12700" cmpd="sng">
-                      <a:noFill/>
-                    </a:lnL>
-                    <a:lnR w="12700" cmpd="sng">
-                      <a:noFill/>
-                    </a:lnR>
-                    <a:lnT w="12700" cmpd="sng">
-                      <a:noFill/>
-                    </a:lnT>
-                    <a:lnB w="12700" cmpd="sng">
-                      <a:noFill/>
-                    </a:lnB>
-                    <a:lnTlToBr w="12700" cmpd="sng">
-                      <a:noFill/>
-                      <a:prstDash val="solid"/>
-                    </a:lnTlToBr>
-                    <a:lnBlToTr w="12700" cmpd="sng">
-                      <a:noFill/>
-                      <a:prstDash val="solid"/>
-                    </a:lnBlToTr>
-                    <a:noFill/>
-                  </a:tcPr>
-                </a:tc>
-                <a:extLst>
-                  <a:ext uri="{0D108BD9-81ED-4DB2-BD59-A6C34878D82A}">
-                    <a16:rowId xmlns:a16="http://schemas.microsoft.com/office/drawing/2014/main" val="1658275772"/>
-                  </a:ext>
-                </a:extLst>
-              </a:tr>
-            </a:tbl>
-          </a:graphicData>
-        </a:graphic>
-      </p:graphicFrame>
     </p:spTree>
     <p:extLst>
       <p:ext uri="{BB962C8B-B14F-4D97-AF65-F5344CB8AC3E}">
-        <p14:creationId xmlns:p14="http://schemas.microsoft.com/office/powerpoint/2010/main" val="1774320817"/>
+        <p14:creationId xmlns:p14="http://schemas.microsoft.com/office/powerpoint/2010/main" val="3839052038"/>
       </p:ext>
     </p:extLst>
   </p:cSld>
